--- a/apps/resources/bundled_files/5-klass-kolom-sabak.pptx
+++ b/apps/resources/bundled_files/5-klass-kolom-sabak.pptx
@@ -5196,7 +5196,7 @@
                 </a:solidFill>
                 <a:latin typeface="PT Sans"/>
               </a:rPr>
-              <a:t>5-класс · Математика</a:t>
+              <a:t/>
             </a:r>
           </a:p>
         </p:txBody>
@@ -5688,7 +5688,7 @@
                 </a:solidFill>
                 <a:latin typeface="PT Sans"/>
               </a:rPr>
-              <a:t>5-класс ›</a:t>
+              <a:t/>
             </a:r>
           </a:p>
           <a:p>
@@ -6621,7 +6621,7 @@
                 </a:solidFill>
                 <a:latin typeface="PT Sans"/>
               </a:rPr>
-              <a:t>5-класс ›</a:t>
+              <a:t/>
             </a:r>
           </a:p>
           <a:p>
@@ -8626,7 +8626,7 @@
                 </a:solidFill>
                 <a:latin typeface="PT Sans"/>
               </a:rPr>
-              <a:t>5-класс ›</a:t>
+              <a:t/>
             </a:r>
           </a:p>
           <a:p>
@@ -11881,7 +11881,7 @@
                 </a:solidFill>
                 <a:latin typeface="PT Sans"/>
               </a:rPr>
-              <a:t>5-класс ›</a:t>
+              <a:t/>
             </a:r>
           </a:p>
           <a:p>
@@ -13211,7 +13211,7 @@
                 </a:solidFill>
                 <a:latin typeface="PT Sans"/>
               </a:rPr>
-              <a:t>5-класс ›</a:t>
+              <a:t/>
             </a:r>
           </a:p>
           <a:p>
@@ -13962,7 +13962,7 @@
                 </a:solidFill>
                 <a:latin typeface="PT Sans"/>
               </a:rPr>
-              <a:t>5-класс ›</a:t>
+              <a:t/>
             </a:r>
           </a:p>
           <a:p>
@@ -14791,7 +14791,7 @@
                 </a:solidFill>
                 <a:latin typeface="PT Sans"/>
               </a:rPr>
-              <a:t>5-класс ›</a:t>
+              <a:t/>
             </a:r>
           </a:p>
           <a:p>
@@ -16379,7 +16379,7 @@
                 </a:solidFill>
                 <a:latin typeface="PT Sans"/>
               </a:rPr>
-              <a:t>5-класс ›</a:t>
+              <a:t/>
             </a:r>
           </a:p>
           <a:p>
@@ -17463,7 +17463,7 @@
                 </a:solidFill>
                 <a:latin typeface="PT Sans"/>
               </a:rPr>
-              <a:t>5-класс ›</a:t>
+              <a:t/>
             </a:r>
           </a:p>
           <a:p>
@@ -18993,7 +18993,7 @@
                 </a:solidFill>
                 <a:latin typeface="PT Sans"/>
               </a:rPr>
-              <a:t>5-класс ›</a:t>
+              <a:t/>
             </a:r>
           </a:p>
           <a:p>
@@ -20993,7 +20993,7 @@
                 </a:solidFill>
                 <a:latin typeface="PT Sans"/>
               </a:rPr>
-              <a:t>5-класс ›</a:t>
+              <a:t/>
             </a:r>
           </a:p>
           <a:p>
@@ -22270,7 +22270,7 @@
                 </a:solidFill>
                 <a:latin typeface="PT Sans"/>
               </a:rPr>
-              <a:t>5-класс ›</a:t>
+              <a:t/>
             </a:r>
           </a:p>
           <a:p>
@@ -23698,7 +23698,7 @@
                 </a:solidFill>
                 <a:latin typeface="PT Sans"/>
               </a:rPr>
-              <a:t>5-класс ›</a:t>
+              <a:t/>
             </a:r>
           </a:p>
           <a:p>
@@ -25154,7 +25154,7 @@
                 </a:solidFill>
                 <a:latin typeface="PT Sans"/>
               </a:rPr>
-              <a:t>5-класс ›</a:t>
+              <a:t/>
             </a:r>
           </a:p>
           <a:p>
@@ -26482,7 +26482,7 @@
                 </a:solidFill>
                 <a:latin typeface="PT Sans"/>
               </a:rPr>
-              <a:t>5-класс ›</a:t>
+              <a:t/>
             </a:r>
           </a:p>
           <a:p>
@@ -27282,7 +27282,7 @@
                 </a:solidFill>
                 <a:latin typeface="PT Sans"/>
               </a:rPr>
-              <a:t>5-класс ›</a:t>
+              <a:t/>
             </a:r>
           </a:p>
           <a:p>
@@ -28123,7 +28123,7 @@
                 </a:solidFill>
                 <a:latin typeface="PT Sans"/>
               </a:rPr>
-              <a:t>5-класс ›</a:t>
+              <a:t/>
             </a:r>
           </a:p>
           <a:p>
@@ -29072,7 +29072,7 @@
                 </a:solidFill>
                 <a:latin typeface="PT Sans"/>
               </a:rPr>
-              <a:t>5-класс ›</a:t>
+              <a:t/>
             </a:r>
           </a:p>
           <a:p>
@@ -30526,7 +30526,7 @@
                 </a:solidFill>
                 <a:latin typeface="PT Sans"/>
               </a:rPr>
-              <a:t>5-класс ›</a:t>
+              <a:t/>
             </a:r>
           </a:p>
           <a:p>
@@ -31272,7 +31272,7 @@
                 </a:solidFill>
                 <a:latin typeface="PT Sans"/>
               </a:rPr>
-              <a:t>5-класс ›</a:t>
+              <a:t/>
             </a:r>
           </a:p>
           <a:p>
@@ -32080,7 +32080,7 @@
                 </a:solidFill>
                 <a:latin typeface="PT Sans"/>
               </a:rPr>
-              <a:t>5-класс ›</a:t>
+              <a:t/>
             </a:r>
           </a:p>
           <a:p>
@@ -33271,7 +33271,7 @@
                 </a:solidFill>
                 <a:latin typeface="PT Sans"/>
               </a:rPr>
-              <a:t>5-класс ›</a:t>
+              <a:t/>
             </a:r>
           </a:p>
           <a:p>
@@ -34450,7 +34450,7 @@
                 </a:solidFill>
                 <a:latin typeface="PT Sans"/>
               </a:rPr>
-              <a:t>5-класс ›</a:t>
+              <a:t/>
             </a:r>
           </a:p>
           <a:p>
@@ -34631,7 +34631,7 @@
                 </a:solidFill>
                 <a:latin typeface="PT Sans"/>
               </a:rPr>
-              <a:t>2-класс</a:t>
+              <a:t/>
             </a:r>
           </a:p>
         </p:txBody>
@@ -34811,7 +34811,7 @@
                 </a:solidFill>
                 <a:latin typeface="PT Sans"/>
               </a:rPr>
-              <a:t>4-класс</a:t>
+              <a:t/>
             </a:r>
           </a:p>
         </p:txBody>
@@ -34991,7 +34991,7 @@
                 </a:solidFill>
                 <a:latin typeface="PT Sans"/>
               </a:rPr>
-              <a:t>5-класс</a:t>
+              <a:t/>
             </a:r>
           </a:p>
         </p:txBody>
@@ -35227,7 +35227,7 @@
                 </a:solidFill>
                 <a:latin typeface="PT Sans"/>
               </a:rPr>
-              <a:t>6-класс</a:t>
+              <a:t/>
             </a:r>
           </a:p>
         </p:txBody>
@@ -35647,7 +35647,7 @@
                 </a:solidFill>
                 <a:latin typeface="PT Sans"/>
               </a:rPr>
-              <a:t>5-класс ›</a:t>
+              <a:t/>
             </a:r>
           </a:p>
           <a:p>
@@ -36795,7 +36795,7 @@
                 </a:solidFill>
                 <a:latin typeface="PT Sans"/>
               </a:rPr>
-              <a:t>5-класс ›</a:t>
+              <a:t/>
             </a:r>
           </a:p>
           <a:p>

--- a/apps/resources/bundled_files/5-klass-kolom-sabak.pptx
+++ b/apps/resources/bundled_files/5-klass-kolom-sabak.pptx
@@ -1582,7 +1582,7 @@
           <a:lstStyle/>
           <a:p>
             <a:r>
-              <a:t>Ой жүгүртүү маданияты (Wenxi Lee, 2.6).</a:t>
+              <a:t>Ой жүгүртүү маданияты (Wenxi Lee, 2,6).</a:t>
             </a:r>
           </a:p>
         </p:txBody>
